--- a/public/videos/repositories/haikyo-archive-map/haikyo-archive-map-tech-preview.pptx
+++ b/public/videos/repositories/haikyo-archive-map/haikyo-archive-map-tech-preview.pptx
@@ -134,7 +134,7 @@
           <p:cNvPr id="2" name="タイトル 1">
             <a:extLst>
               <a:ext uri="{FF2B5EF4-FFF2-40B4-BE49-F238E27FC236}">
-                <a16:creationId xmlns:a16="http://schemas.microsoft.com/office/drawing/2014/main" id="{A4AAED6D-2CA8-78C8-055D-DD6012592D0B}"/>
+                <a16:creationId xmlns:a16="http://schemas.microsoft.com/office/drawing/2014/main" id="{2BCF88D3-9884-71AE-EE0E-600AB5A315F6}"/>
               </a:ext>
             </a:extLst>
           </p:cNvPr>
@@ -171,7 +171,7 @@
           <p:cNvPr id="3" name="字幕 2">
             <a:extLst>
               <a:ext uri="{FF2B5EF4-FFF2-40B4-BE49-F238E27FC236}">
-                <a16:creationId xmlns:a16="http://schemas.microsoft.com/office/drawing/2014/main" id="{64A8B4CD-E644-C0EE-E1C7-7B010E5F3B98}"/>
+                <a16:creationId xmlns:a16="http://schemas.microsoft.com/office/drawing/2014/main" id="{17D033B0-8D76-FC96-A605-B7C810D8EE20}"/>
               </a:ext>
             </a:extLst>
           </p:cNvPr>
@@ -241,7 +241,7 @@
           <p:cNvPr id="4" name="日付プレースホルダー 3">
             <a:extLst>
               <a:ext uri="{FF2B5EF4-FFF2-40B4-BE49-F238E27FC236}">
-                <a16:creationId xmlns:a16="http://schemas.microsoft.com/office/drawing/2014/main" id="{982B6533-C992-C4A9-5CBD-2309C8792F7A}"/>
+                <a16:creationId xmlns:a16="http://schemas.microsoft.com/office/drawing/2014/main" id="{3A533448-E2C5-3AB6-6B6C-900F030945DB}"/>
               </a:ext>
             </a:extLst>
           </p:cNvPr>
@@ -257,7 +257,7 @@
           <a:bodyPr/>
           <a:lstStyle/>
           <a:p>
-            <a:fld id="{703FD16C-B233-48BD-87F9-A47BB7B7533B}" type="datetimeFigureOut">
+            <a:fld id="{91888F1A-99ED-403C-8F80-A743CB4F7D62}" type="datetimeFigureOut">
               <a:rPr kumimoji="1" lang="ja-JP" altLang="en-US" smtClean="0"/>
               <a:t>2026/7/30</a:t>
             </a:fld>
@@ -270,7 +270,7 @@
           <p:cNvPr id="5" name="フッター プレースホルダー 4">
             <a:extLst>
               <a:ext uri="{FF2B5EF4-FFF2-40B4-BE49-F238E27FC236}">
-                <a16:creationId xmlns:a16="http://schemas.microsoft.com/office/drawing/2014/main" id="{91A99458-3802-E28E-A0FF-EFD638B4BC19}"/>
+                <a16:creationId xmlns:a16="http://schemas.microsoft.com/office/drawing/2014/main" id="{35ADE313-51EB-2323-E9BC-E0D4DA4C17BF}"/>
               </a:ext>
             </a:extLst>
           </p:cNvPr>
@@ -295,7 +295,7 @@
           <p:cNvPr id="6" name="スライド番号プレースホルダー 5">
             <a:extLst>
               <a:ext uri="{FF2B5EF4-FFF2-40B4-BE49-F238E27FC236}">
-                <a16:creationId xmlns:a16="http://schemas.microsoft.com/office/drawing/2014/main" id="{6BC49E4F-B46C-04A1-D548-5321DB6A42ED}"/>
+                <a16:creationId xmlns:a16="http://schemas.microsoft.com/office/drawing/2014/main" id="{90A8B585-AE83-CF23-35B7-C287000A1E78}"/>
               </a:ext>
             </a:extLst>
           </p:cNvPr>
@@ -311,7 +311,7 @@
           <a:bodyPr/>
           <a:lstStyle/>
           <a:p>
-            <a:fld id="{0C0267CF-6C13-4625-9FA2-C73A9AB1C488}" type="slidenum">
+            <a:fld id="{10E4B28B-CAE4-45D9-B67A-CB4442962322}" type="slidenum">
               <a:rPr kumimoji="1" lang="ja-JP" altLang="en-US" smtClean="0"/>
               <a:t>‹#›</a:t>
             </a:fld>
@@ -322,7 +322,7 @@
     </p:spTree>
     <p:extLst>
       <p:ext uri="{BB962C8B-B14F-4D97-AF65-F5344CB8AC3E}">
-        <p14:creationId xmlns:p14="http://schemas.microsoft.com/office/powerpoint/2010/main" val="697705415"/>
+        <p14:creationId xmlns:p14="http://schemas.microsoft.com/office/powerpoint/2010/main" val="2362350310"/>
       </p:ext>
     </p:extLst>
   </p:cSld>
@@ -354,7 +354,7 @@
           <p:cNvPr id="2" name="タイトル 1">
             <a:extLst>
               <a:ext uri="{FF2B5EF4-FFF2-40B4-BE49-F238E27FC236}">
-                <a16:creationId xmlns:a16="http://schemas.microsoft.com/office/drawing/2014/main" id="{E9A8CF79-5376-E891-A192-57526AFE47F0}"/>
+                <a16:creationId xmlns:a16="http://schemas.microsoft.com/office/drawing/2014/main" id="{88B64926-5EFF-8328-114F-4EDF316E44E5}"/>
               </a:ext>
             </a:extLst>
           </p:cNvPr>
@@ -382,7 +382,7 @@
           <p:cNvPr id="3" name="縦書きテキスト プレースホルダー 2">
             <a:extLst>
               <a:ext uri="{FF2B5EF4-FFF2-40B4-BE49-F238E27FC236}">
-                <a16:creationId xmlns:a16="http://schemas.microsoft.com/office/drawing/2014/main" id="{21EE8233-D147-DE1C-0851-F7BE6E952D64}"/>
+                <a16:creationId xmlns:a16="http://schemas.microsoft.com/office/drawing/2014/main" id="{30CD5A84-60B2-6439-ACC6-E98DF80DB25A}"/>
               </a:ext>
             </a:extLst>
           </p:cNvPr>
@@ -471,7 +471,7 @@
           <p:cNvPr id="4" name="日付プレースホルダー 3">
             <a:extLst>
               <a:ext uri="{FF2B5EF4-FFF2-40B4-BE49-F238E27FC236}">
-                <a16:creationId xmlns:a16="http://schemas.microsoft.com/office/drawing/2014/main" id="{679A3D1C-FD73-B4AF-BB34-81906EBFA194}"/>
+                <a16:creationId xmlns:a16="http://schemas.microsoft.com/office/drawing/2014/main" id="{94D8F9B0-FF39-A318-23BB-8F0193C55DCD}"/>
               </a:ext>
             </a:extLst>
           </p:cNvPr>
@@ -487,7 +487,7 @@
           <a:bodyPr/>
           <a:lstStyle/>
           <a:p>
-            <a:fld id="{703FD16C-B233-48BD-87F9-A47BB7B7533B}" type="datetimeFigureOut">
+            <a:fld id="{91888F1A-99ED-403C-8F80-A743CB4F7D62}" type="datetimeFigureOut">
               <a:rPr kumimoji="1" lang="ja-JP" altLang="en-US" smtClean="0"/>
               <a:t>2026/7/30</a:t>
             </a:fld>
@@ -500,7 +500,7 @@
           <p:cNvPr id="5" name="フッター プレースホルダー 4">
             <a:extLst>
               <a:ext uri="{FF2B5EF4-FFF2-40B4-BE49-F238E27FC236}">
-                <a16:creationId xmlns:a16="http://schemas.microsoft.com/office/drawing/2014/main" id="{A1060703-772B-B947-6CE3-0145005479D0}"/>
+                <a16:creationId xmlns:a16="http://schemas.microsoft.com/office/drawing/2014/main" id="{05439293-184B-0E83-EFB0-6F8254B29746}"/>
               </a:ext>
             </a:extLst>
           </p:cNvPr>
@@ -525,7 +525,7 @@
           <p:cNvPr id="6" name="スライド番号プレースホルダー 5">
             <a:extLst>
               <a:ext uri="{FF2B5EF4-FFF2-40B4-BE49-F238E27FC236}">
-                <a16:creationId xmlns:a16="http://schemas.microsoft.com/office/drawing/2014/main" id="{A7F11E4E-BDD7-CE4D-84E9-B518EE95DEA8}"/>
+                <a16:creationId xmlns:a16="http://schemas.microsoft.com/office/drawing/2014/main" id="{EE0E197F-9AC7-CBA4-F745-B517F5F09A12}"/>
               </a:ext>
             </a:extLst>
           </p:cNvPr>
@@ -541,7 +541,7 @@
           <a:bodyPr/>
           <a:lstStyle/>
           <a:p>
-            <a:fld id="{0C0267CF-6C13-4625-9FA2-C73A9AB1C488}" type="slidenum">
+            <a:fld id="{10E4B28B-CAE4-45D9-B67A-CB4442962322}" type="slidenum">
               <a:rPr kumimoji="1" lang="ja-JP" altLang="en-US" smtClean="0"/>
               <a:t>‹#›</a:t>
             </a:fld>
@@ -552,7 +552,7 @@
     </p:spTree>
     <p:extLst>
       <p:ext uri="{BB962C8B-B14F-4D97-AF65-F5344CB8AC3E}">
-        <p14:creationId xmlns:p14="http://schemas.microsoft.com/office/powerpoint/2010/main" val="3866126761"/>
+        <p14:creationId xmlns:p14="http://schemas.microsoft.com/office/powerpoint/2010/main" val="3729357084"/>
       </p:ext>
     </p:extLst>
   </p:cSld>
@@ -584,7 +584,7 @@
           <p:cNvPr id="2" name="縦書きタイトル 1">
             <a:extLst>
               <a:ext uri="{FF2B5EF4-FFF2-40B4-BE49-F238E27FC236}">
-                <a16:creationId xmlns:a16="http://schemas.microsoft.com/office/drawing/2014/main" id="{1BB42801-0093-D651-F342-1229987356E0}"/>
+                <a16:creationId xmlns:a16="http://schemas.microsoft.com/office/drawing/2014/main" id="{CA7FE7E9-9FCB-1214-D44E-8A1A988F1546}"/>
               </a:ext>
             </a:extLst>
           </p:cNvPr>
@@ -617,7 +617,7 @@
           <p:cNvPr id="3" name="縦書きテキスト プレースホルダー 2">
             <a:extLst>
               <a:ext uri="{FF2B5EF4-FFF2-40B4-BE49-F238E27FC236}">
-                <a16:creationId xmlns:a16="http://schemas.microsoft.com/office/drawing/2014/main" id="{00303CA8-CDE2-7206-B45B-621307947384}"/>
+                <a16:creationId xmlns:a16="http://schemas.microsoft.com/office/drawing/2014/main" id="{C9087743-74B6-0512-49A4-DE9806CD5063}"/>
               </a:ext>
             </a:extLst>
           </p:cNvPr>
@@ -711,7 +711,7 @@
           <p:cNvPr id="4" name="日付プレースホルダー 3">
             <a:extLst>
               <a:ext uri="{FF2B5EF4-FFF2-40B4-BE49-F238E27FC236}">
-                <a16:creationId xmlns:a16="http://schemas.microsoft.com/office/drawing/2014/main" id="{D9575CAE-21AD-42D9-BE81-35579250CA7F}"/>
+                <a16:creationId xmlns:a16="http://schemas.microsoft.com/office/drawing/2014/main" id="{C9C4E163-3C77-FED3-DC5A-DC87733854D4}"/>
               </a:ext>
             </a:extLst>
           </p:cNvPr>
@@ -727,7 +727,7 @@
           <a:bodyPr/>
           <a:lstStyle/>
           <a:p>
-            <a:fld id="{703FD16C-B233-48BD-87F9-A47BB7B7533B}" type="datetimeFigureOut">
+            <a:fld id="{91888F1A-99ED-403C-8F80-A743CB4F7D62}" type="datetimeFigureOut">
               <a:rPr kumimoji="1" lang="ja-JP" altLang="en-US" smtClean="0"/>
               <a:t>2026/7/30</a:t>
             </a:fld>
@@ -740,7 +740,7 @@
           <p:cNvPr id="5" name="フッター プレースホルダー 4">
             <a:extLst>
               <a:ext uri="{FF2B5EF4-FFF2-40B4-BE49-F238E27FC236}">
-                <a16:creationId xmlns:a16="http://schemas.microsoft.com/office/drawing/2014/main" id="{16B37D41-C5A9-868C-C026-BF0B10FC0386}"/>
+                <a16:creationId xmlns:a16="http://schemas.microsoft.com/office/drawing/2014/main" id="{477A63B1-6C89-A73A-E92D-ABBBC22B848C}"/>
               </a:ext>
             </a:extLst>
           </p:cNvPr>
@@ -765,7 +765,7 @@
           <p:cNvPr id="6" name="スライド番号プレースホルダー 5">
             <a:extLst>
               <a:ext uri="{FF2B5EF4-FFF2-40B4-BE49-F238E27FC236}">
-                <a16:creationId xmlns:a16="http://schemas.microsoft.com/office/drawing/2014/main" id="{781DD922-FE27-42C5-6249-DF2683B94CC8}"/>
+                <a16:creationId xmlns:a16="http://schemas.microsoft.com/office/drawing/2014/main" id="{9003A9F7-9E14-1DAA-C903-212AFAAEE249}"/>
               </a:ext>
             </a:extLst>
           </p:cNvPr>
@@ -781,7 +781,7 @@
           <a:bodyPr/>
           <a:lstStyle/>
           <a:p>
-            <a:fld id="{0C0267CF-6C13-4625-9FA2-C73A9AB1C488}" type="slidenum">
+            <a:fld id="{10E4B28B-CAE4-45D9-B67A-CB4442962322}" type="slidenum">
               <a:rPr kumimoji="1" lang="ja-JP" altLang="en-US" smtClean="0"/>
               <a:t>‹#›</a:t>
             </a:fld>
@@ -792,7 +792,7 @@
     </p:spTree>
     <p:extLst>
       <p:ext uri="{BB962C8B-B14F-4D97-AF65-F5344CB8AC3E}">
-        <p14:creationId xmlns:p14="http://schemas.microsoft.com/office/powerpoint/2010/main" val="4153313704"/>
+        <p14:creationId xmlns:p14="http://schemas.microsoft.com/office/powerpoint/2010/main" val="858458988"/>
       </p:ext>
     </p:extLst>
   </p:cSld>
@@ -824,7 +824,7 @@
           <p:cNvPr id="2" name="タイトル 1">
             <a:extLst>
               <a:ext uri="{FF2B5EF4-FFF2-40B4-BE49-F238E27FC236}">
-                <a16:creationId xmlns:a16="http://schemas.microsoft.com/office/drawing/2014/main" id="{68ABA81B-B17C-F222-623D-1575E8F837CB}"/>
+                <a16:creationId xmlns:a16="http://schemas.microsoft.com/office/drawing/2014/main" id="{BFE231D8-60A8-9F81-B62A-134B7F023E83}"/>
               </a:ext>
             </a:extLst>
           </p:cNvPr>
@@ -852,7 +852,7 @@
           <p:cNvPr id="3" name="コンテンツ プレースホルダー 2">
             <a:extLst>
               <a:ext uri="{FF2B5EF4-FFF2-40B4-BE49-F238E27FC236}">
-                <a16:creationId xmlns:a16="http://schemas.microsoft.com/office/drawing/2014/main" id="{67F479B0-83FC-1A03-BBE9-9D7165A2C57B}"/>
+                <a16:creationId xmlns:a16="http://schemas.microsoft.com/office/drawing/2014/main" id="{7367EA03-D63C-8B1F-C9B2-8AE9D99B05FA}"/>
               </a:ext>
             </a:extLst>
           </p:cNvPr>
@@ -941,7 +941,7 @@
           <p:cNvPr id="4" name="日付プレースホルダー 3">
             <a:extLst>
               <a:ext uri="{FF2B5EF4-FFF2-40B4-BE49-F238E27FC236}">
-                <a16:creationId xmlns:a16="http://schemas.microsoft.com/office/drawing/2014/main" id="{A4AE610C-59DF-AB63-A039-E6F10DABC376}"/>
+                <a16:creationId xmlns:a16="http://schemas.microsoft.com/office/drawing/2014/main" id="{49FB5D83-FE80-DE2B-7E69-ADBA6DA49720}"/>
               </a:ext>
             </a:extLst>
           </p:cNvPr>
@@ -957,7 +957,7 @@
           <a:bodyPr/>
           <a:lstStyle/>
           <a:p>
-            <a:fld id="{703FD16C-B233-48BD-87F9-A47BB7B7533B}" type="datetimeFigureOut">
+            <a:fld id="{91888F1A-99ED-403C-8F80-A743CB4F7D62}" type="datetimeFigureOut">
               <a:rPr kumimoji="1" lang="ja-JP" altLang="en-US" smtClean="0"/>
               <a:t>2026/7/30</a:t>
             </a:fld>
@@ -970,7 +970,7 @@
           <p:cNvPr id="5" name="フッター プレースホルダー 4">
             <a:extLst>
               <a:ext uri="{FF2B5EF4-FFF2-40B4-BE49-F238E27FC236}">
-                <a16:creationId xmlns:a16="http://schemas.microsoft.com/office/drawing/2014/main" id="{63189BE0-494E-76CC-2A2F-FEF7D0253B13}"/>
+                <a16:creationId xmlns:a16="http://schemas.microsoft.com/office/drawing/2014/main" id="{730DA237-CD57-4E74-C0FA-CA11491CDC35}"/>
               </a:ext>
             </a:extLst>
           </p:cNvPr>
@@ -995,7 +995,7 @@
           <p:cNvPr id="6" name="スライド番号プレースホルダー 5">
             <a:extLst>
               <a:ext uri="{FF2B5EF4-FFF2-40B4-BE49-F238E27FC236}">
-                <a16:creationId xmlns:a16="http://schemas.microsoft.com/office/drawing/2014/main" id="{7EB60EFF-74EF-CF01-8969-8BA8DE586680}"/>
+                <a16:creationId xmlns:a16="http://schemas.microsoft.com/office/drawing/2014/main" id="{FCC818F2-94D0-3D77-A463-80F4834231A6}"/>
               </a:ext>
             </a:extLst>
           </p:cNvPr>
@@ -1011,7 +1011,7 @@
           <a:bodyPr/>
           <a:lstStyle/>
           <a:p>
-            <a:fld id="{0C0267CF-6C13-4625-9FA2-C73A9AB1C488}" type="slidenum">
+            <a:fld id="{10E4B28B-CAE4-45D9-B67A-CB4442962322}" type="slidenum">
               <a:rPr kumimoji="1" lang="ja-JP" altLang="en-US" smtClean="0"/>
               <a:t>‹#›</a:t>
             </a:fld>
@@ -1022,7 +1022,7 @@
     </p:spTree>
     <p:extLst>
       <p:ext uri="{BB962C8B-B14F-4D97-AF65-F5344CB8AC3E}">
-        <p14:creationId xmlns:p14="http://schemas.microsoft.com/office/powerpoint/2010/main" val="2808125457"/>
+        <p14:creationId xmlns:p14="http://schemas.microsoft.com/office/powerpoint/2010/main" val="958632775"/>
       </p:ext>
     </p:extLst>
   </p:cSld>
@@ -1054,7 +1054,7 @@
           <p:cNvPr id="2" name="タイトル 1">
             <a:extLst>
               <a:ext uri="{FF2B5EF4-FFF2-40B4-BE49-F238E27FC236}">
-                <a16:creationId xmlns:a16="http://schemas.microsoft.com/office/drawing/2014/main" id="{2B03A45B-5ABA-FFBE-7D75-841A908E6B46}"/>
+                <a16:creationId xmlns:a16="http://schemas.microsoft.com/office/drawing/2014/main" id="{F7EF7577-E45E-C0CD-B581-919CCC533304}"/>
               </a:ext>
             </a:extLst>
           </p:cNvPr>
@@ -1091,7 +1091,7 @@
           <p:cNvPr id="3" name="テキスト プレースホルダー 2">
             <a:extLst>
               <a:ext uri="{FF2B5EF4-FFF2-40B4-BE49-F238E27FC236}">
-                <a16:creationId xmlns:a16="http://schemas.microsoft.com/office/drawing/2014/main" id="{66AD080D-FF24-4BA8-3812-7CA6AE5C812C}"/>
+                <a16:creationId xmlns:a16="http://schemas.microsoft.com/office/drawing/2014/main" id="{31E8F10C-4012-969C-410C-BA1C917BA40E}"/>
               </a:ext>
             </a:extLst>
           </p:cNvPr>
@@ -1216,7 +1216,7 @@
           <p:cNvPr id="4" name="日付プレースホルダー 3">
             <a:extLst>
               <a:ext uri="{FF2B5EF4-FFF2-40B4-BE49-F238E27FC236}">
-                <a16:creationId xmlns:a16="http://schemas.microsoft.com/office/drawing/2014/main" id="{F8630965-4E44-94A0-9A3B-A830EE228316}"/>
+                <a16:creationId xmlns:a16="http://schemas.microsoft.com/office/drawing/2014/main" id="{31278A25-F598-A441-1962-8F70AAFEA052}"/>
               </a:ext>
             </a:extLst>
           </p:cNvPr>
@@ -1232,7 +1232,7 @@
           <a:bodyPr/>
           <a:lstStyle/>
           <a:p>
-            <a:fld id="{703FD16C-B233-48BD-87F9-A47BB7B7533B}" type="datetimeFigureOut">
+            <a:fld id="{91888F1A-99ED-403C-8F80-A743CB4F7D62}" type="datetimeFigureOut">
               <a:rPr kumimoji="1" lang="ja-JP" altLang="en-US" smtClean="0"/>
               <a:t>2026/7/30</a:t>
             </a:fld>
@@ -1245,7 +1245,7 @@
           <p:cNvPr id="5" name="フッター プレースホルダー 4">
             <a:extLst>
               <a:ext uri="{FF2B5EF4-FFF2-40B4-BE49-F238E27FC236}">
-                <a16:creationId xmlns:a16="http://schemas.microsoft.com/office/drawing/2014/main" id="{28F61C71-B6B9-F9CC-D450-7AE3E3D8606A}"/>
+                <a16:creationId xmlns:a16="http://schemas.microsoft.com/office/drawing/2014/main" id="{AF346DC3-34A2-A64A-31FF-067086A7171C}"/>
               </a:ext>
             </a:extLst>
           </p:cNvPr>
@@ -1270,7 +1270,7 @@
           <p:cNvPr id="6" name="スライド番号プレースホルダー 5">
             <a:extLst>
               <a:ext uri="{FF2B5EF4-FFF2-40B4-BE49-F238E27FC236}">
-                <a16:creationId xmlns:a16="http://schemas.microsoft.com/office/drawing/2014/main" id="{00E87E99-E15E-52CE-9D4B-C373D33D7E1D}"/>
+                <a16:creationId xmlns:a16="http://schemas.microsoft.com/office/drawing/2014/main" id="{0B6994BE-D322-D62B-0994-894F5982FD22}"/>
               </a:ext>
             </a:extLst>
           </p:cNvPr>
@@ -1286,7 +1286,7 @@
           <a:bodyPr/>
           <a:lstStyle/>
           <a:p>
-            <a:fld id="{0C0267CF-6C13-4625-9FA2-C73A9AB1C488}" type="slidenum">
+            <a:fld id="{10E4B28B-CAE4-45D9-B67A-CB4442962322}" type="slidenum">
               <a:rPr kumimoji="1" lang="ja-JP" altLang="en-US" smtClean="0"/>
               <a:t>‹#›</a:t>
             </a:fld>
@@ -1297,7 +1297,7 @@
     </p:spTree>
     <p:extLst>
       <p:ext uri="{BB962C8B-B14F-4D97-AF65-F5344CB8AC3E}">
-        <p14:creationId xmlns:p14="http://schemas.microsoft.com/office/powerpoint/2010/main" val="3367629948"/>
+        <p14:creationId xmlns:p14="http://schemas.microsoft.com/office/powerpoint/2010/main" val="1253039985"/>
       </p:ext>
     </p:extLst>
   </p:cSld>
@@ -1329,7 +1329,7 @@
           <p:cNvPr id="2" name="タイトル 1">
             <a:extLst>
               <a:ext uri="{FF2B5EF4-FFF2-40B4-BE49-F238E27FC236}">
-                <a16:creationId xmlns:a16="http://schemas.microsoft.com/office/drawing/2014/main" id="{301E82BD-A5D9-4FCB-C4A0-07785E008B11}"/>
+                <a16:creationId xmlns:a16="http://schemas.microsoft.com/office/drawing/2014/main" id="{070C3A51-F7E7-4FA0-D50F-28C55377F0EC}"/>
               </a:ext>
             </a:extLst>
           </p:cNvPr>
@@ -1357,7 +1357,7 @@
           <p:cNvPr id="3" name="コンテンツ プレースホルダー 2">
             <a:extLst>
               <a:ext uri="{FF2B5EF4-FFF2-40B4-BE49-F238E27FC236}">
-                <a16:creationId xmlns:a16="http://schemas.microsoft.com/office/drawing/2014/main" id="{6FCAB1FF-5E1C-9732-736E-AD7E6F9C9D0F}"/>
+                <a16:creationId xmlns:a16="http://schemas.microsoft.com/office/drawing/2014/main" id="{2186402C-8891-56C5-7865-89D476018657}"/>
               </a:ext>
             </a:extLst>
           </p:cNvPr>
@@ -1451,7 +1451,7 @@
           <p:cNvPr id="4" name="コンテンツ プレースホルダー 3">
             <a:extLst>
               <a:ext uri="{FF2B5EF4-FFF2-40B4-BE49-F238E27FC236}">
-                <a16:creationId xmlns:a16="http://schemas.microsoft.com/office/drawing/2014/main" id="{FD4AB720-F022-8A32-2439-DD71E8C05BD3}"/>
+                <a16:creationId xmlns:a16="http://schemas.microsoft.com/office/drawing/2014/main" id="{A6A15B59-90FD-864F-7A86-339B6C9A4907}"/>
               </a:ext>
             </a:extLst>
           </p:cNvPr>
@@ -1545,7 +1545,7 @@
           <p:cNvPr id="5" name="日付プレースホルダー 4">
             <a:extLst>
               <a:ext uri="{FF2B5EF4-FFF2-40B4-BE49-F238E27FC236}">
-                <a16:creationId xmlns:a16="http://schemas.microsoft.com/office/drawing/2014/main" id="{659273BC-A74E-27B5-AF3E-1A683628D8A8}"/>
+                <a16:creationId xmlns:a16="http://schemas.microsoft.com/office/drawing/2014/main" id="{BE48AD5D-7CB9-B86B-5AF4-DAF37FEECF5D}"/>
               </a:ext>
             </a:extLst>
           </p:cNvPr>
@@ -1561,7 +1561,7 @@
           <a:bodyPr/>
           <a:lstStyle/>
           <a:p>
-            <a:fld id="{703FD16C-B233-48BD-87F9-A47BB7B7533B}" type="datetimeFigureOut">
+            <a:fld id="{91888F1A-99ED-403C-8F80-A743CB4F7D62}" type="datetimeFigureOut">
               <a:rPr kumimoji="1" lang="ja-JP" altLang="en-US" smtClean="0"/>
               <a:t>2026/7/30</a:t>
             </a:fld>
@@ -1574,7 +1574,7 @@
           <p:cNvPr id="6" name="フッター プレースホルダー 5">
             <a:extLst>
               <a:ext uri="{FF2B5EF4-FFF2-40B4-BE49-F238E27FC236}">
-                <a16:creationId xmlns:a16="http://schemas.microsoft.com/office/drawing/2014/main" id="{C3863F2A-6FBC-FBD4-3816-86346501930C}"/>
+                <a16:creationId xmlns:a16="http://schemas.microsoft.com/office/drawing/2014/main" id="{8155C124-0E94-14FC-C40C-C549EF472BC4}"/>
               </a:ext>
             </a:extLst>
           </p:cNvPr>
@@ -1599,7 +1599,7 @@
           <p:cNvPr id="7" name="スライド番号プレースホルダー 6">
             <a:extLst>
               <a:ext uri="{FF2B5EF4-FFF2-40B4-BE49-F238E27FC236}">
-                <a16:creationId xmlns:a16="http://schemas.microsoft.com/office/drawing/2014/main" id="{9FD19063-A5F2-D159-3E80-FF0DC7278A8B}"/>
+                <a16:creationId xmlns:a16="http://schemas.microsoft.com/office/drawing/2014/main" id="{E873D74A-4818-2CB5-386A-A10B85A33249}"/>
               </a:ext>
             </a:extLst>
           </p:cNvPr>
@@ -1615,7 +1615,7 @@
           <a:bodyPr/>
           <a:lstStyle/>
           <a:p>
-            <a:fld id="{0C0267CF-6C13-4625-9FA2-C73A9AB1C488}" type="slidenum">
+            <a:fld id="{10E4B28B-CAE4-45D9-B67A-CB4442962322}" type="slidenum">
               <a:rPr kumimoji="1" lang="ja-JP" altLang="en-US" smtClean="0"/>
               <a:t>‹#›</a:t>
             </a:fld>
@@ -1626,7 +1626,7 @@
     </p:spTree>
     <p:extLst>
       <p:ext uri="{BB962C8B-B14F-4D97-AF65-F5344CB8AC3E}">
-        <p14:creationId xmlns:p14="http://schemas.microsoft.com/office/powerpoint/2010/main" val="2234915096"/>
+        <p14:creationId xmlns:p14="http://schemas.microsoft.com/office/powerpoint/2010/main" val="2246073608"/>
       </p:ext>
     </p:extLst>
   </p:cSld>
@@ -1658,7 +1658,7 @@
           <p:cNvPr id="2" name="タイトル 1">
             <a:extLst>
               <a:ext uri="{FF2B5EF4-FFF2-40B4-BE49-F238E27FC236}">
-                <a16:creationId xmlns:a16="http://schemas.microsoft.com/office/drawing/2014/main" id="{07554679-1898-7060-9A10-D2DD76D9299A}"/>
+                <a16:creationId xmlns:a16="http://schemas.microsoft.com/office/drawing/2014/main" id="{DCF123D8-3520-F05B-7A0C-7654E012F6B7}"/>
               </a:ext>
             </a:extLst>
           </p:cNvPr>
@@ -1691,7 +1691,7 @@
           <p:cNvPr id="3" name="テキスト プレースホルダー 2">
             <a:extLst>
               <a:ext uri="{FF2B5EF4-FFF2-40B4-BE49-F238E27FC236}">
-                <a16:creationId xmlns:a16="http://schemas.microsoft.com/office/drawing/2014/main" id="{480A999B-AC0F-F488-97CC-9F744E2CCD41}"/>
+                <a16:creationId xmlns:a16="http://schemas.microsoft.com/office/drawing/2014/main" id="{0721C547-074D-1477-D155-613A202A4573}"/>
               </a:ext>
             </a:extLst>
           </p:cNvPr>
@@ -1762,7 +1762,7 @@
           <p:cNvPr id="4" name="コンテンツ プレースホルダー 3">
             <a:extLst>
               <a:ext uri="{FF2B5EF4-FFF2-40B4-BE49-F238E27FC236}">
-                <a16:creationId xmlns:a16="http://schemas.microsoft.com/office/drawing/2014/main" id="{A6A02AB4-DD33-D8C0-02DD-4DC3BB702F83}"/>
+                <a16:creationId xmlns:a16="http://schemas.microsoft.com/office/drawing/2014/main" id="{A65D11D2-01FE-FE55-0C07-272E2CFCCF5D}"/>
               </a:ext>
             </a:extLst>
           </p:cNvPr>
@@ -1856,7 +1856,7 @@
           <p:cNvPr id="5" name="テキスト プレースホルダー 4">
             <a:extLst>
               <a:ext uri="{FF2B5EF4-FFF2-40B4-BE49-F238E27FC236}">
-                <a16:creationId xmlns:a16="http://schemas.microsoft.com/office/drawing/2014/main" id="{85BBDE8F-61C3-183F-536A-8D9974112487}"/>
+                <a16:creationId xmlns:a16="http://schemas.microsoft.com/office/drawing/2014/main" id="{D1916B36-A420-C170-5BF8-1913ECAA5F3C}"/>
               </a:ext>
             </a:extLst>
           </p:cNvPr>
@@ -1927,7 +1927,7 @@
           <p:cNvPr id="6" name="コンテンツ プレースホルダー 5">
             <a:extLst>
               <a:ext uri="{FF2B5EF4-FFF2-40B4-BE49-F238E27FC236}">
-                <a16:creationId xmlns:a16="http://schemas.microsoft.com/office/drawing/2014/main" id="{BADDFB68-F4AC-AE64-376B-4849A2387033}"/>
+                <a16:creationId xmlns:a16="http://schemas.microsoft.com/office/drawing/2014/main" id="{A51AEE2F-2B9D-1AAB-A8EF-D8553B400A24}"/>
               </a:ext>
             </a:extLst>
           </p:cNvPr>
@@ -2021,7 +2021,7 @@
           <p:cNvPr id="7" name="日付プレースホルダー 6">
             <a:extLst>
               <a:ext uri="{FF2B5EF4-FFF2-40B4-BE49-F238E27FC236}">
-                <a16:creationId xmlns:a16="http://schemas.microsoft.com/office/drawing/2014/main" id="{2A931031-76D1-0F2B-8944-9E79C3E2B074}"/>
+                <a16:creationId xmlns:a16="http://schemas.microsoft.com/office/drawing/2014/main" id="{1AB93FB7-B2E2-FDE1-DAF7-389D1B23B9F2}"/>
               </a:ext>
             </a:extLst>
           </p:cNvPr>
@@ -2037,7 +2037,7 @@
           <a:bodyPr/>
           <a:lstStyle/>
           <a:p>
-            <a:fld id="{703FD16C-B233-48BD-87F9-A47BB7B7533B}" type="datetimeFigureOut">
+            <a:fld id="{91888F1A-99ED-403C-8F80-A743CB4F7D62}" type="datetimeFigureOut">
               <a:rPr kumimoji="1" lang="ja-JP" altLang="en-US" smtClean="0"/>
               <a:t>2026/7/30</a:t>
             </a:fld>
@@ -2050,7 +2050,7 @@
           <p:cNvPr id="8" name="フッター プレースホルダー 7">
             <a:extLst>
               <a:ext uri="{FF2B5EF4-FFF2-40B4-BE49-F238E27FC236}">
-                <a16:creationId xmlns:a16="http://schemas.microsoft.com/office/drawing/2014/main" id="{4CF53B7B-371F-DB62-3021-268C51296FE9}"/>
+                <a16:creationId xmlns:a16="http://schemas.microsoft.com/office/drawing/2014/main" id="{CECF5E21-D436-6EC9-F181-01B7446C9839}"/>
               </a:ext>
             </a:extLst>
           </p:cNvPr>
@@ -2075,7 +2075,7 @@
           <p:cNvPr id="9" name="スライド番号プレースホルダー 8">
             <a:extLst>
               <a:ext uri="{FF2B5EF4-FFF2-40B4-BE49-F238E27FC236}">
-                <a16:creationId xmlns:a16="http://schemas.microsoft.com/office/drawing/2014/main" id="{83027B06-AB97-ED21-5AEE-A74817B5249D}"/>
+                <a16:creationId xmlns:a16="http://schemas.microsoft.com/office/drawing/2014/main" id="{E503888F-9B15-62B7-A4A8-03C57298A11C}"/>
               </a:ext>
             </a:extLst>
           </p:cNvPr>
@@ -2091,7 +2091,7 @@
           <a:bodyPr/>
           <a:lstStyle/>
           <a:p>
-            <a:fld id="{0C0267CF-6C13-4625-9FA2-C73A9AB1C488}" type="slidenum">
+            <a:fld id="{10E4B28B-CAE4-45D9-B67A-CB4442962322}" type="slidenum">
               <a:rPr kumimoji="1" lang="ja-JP" altLang="en-US" smtClean="0"/>
               <a:t>‹#›</a:t>
             </a:fld>
@@ -2102,7 +2102,7 @@
     </p:spTree>
     <p:extLst>
       <p:ext uri="{BB962C8B-B14F-4D97-AF65-F5344CB8AC3E}">
-        <p14:creationId xmlns:p14="http://schemas.microsoft.com/office/powerpoint/2010/main" val="2776594067"/>
+        <p14:creationId xmlns:p14="http://schemas.microsoft.com/office/powerpoint/2010/main" val="3920320140"/>
       </p:ext>
     </p:extLst>
   </p:cSld>
@@ -2134,7 +2134,7 @@
           <p:cNvPr id="2" name="タイトル 1">
             <a:extLst>
               <a:ext uri="{FF2B5EF4-FFF2-40B4-BE49-F238E27FC236}">
-                <a16:creationId xmlns:a16="http://schemas.microsoft.com/office/drawing/2014/main" id="{AA988205-86BE-EC10-BA0E-BF71E58D4CF4}"/>
+                <a16:creationId xmlns:a16="http://schemas.microsoft.com/office/drawing/2014/main" id="{8F74CAD8-9240-BD24-B99D-3E8B783E4DB8}"/>
               </a:ext>
             </a:extLst>
           </p:cNvPr>
@@ -2162,7 +2162,7 @@
           <p:cNvPr id="3" name="日付プレースホルダー 2">
             <a:extLst>
               <a:ext uri="{FF2B5EF4-FFF2-40B4-BE49-F238E27FC236}">
-                <a16:creationId xmlns:a16="http://schemas.microsoft.com/office/drawing/2014/main" id="{F6F50D24-7CC3-DD58-CCB2-C45C964348CE}"/>
+                <a16:creationId xmlns:a16="http://schemas.microsoft.com/office/drawing/2014/main" id="{D7A5C7F6-B0DD-644D-5F51-8D027D048485}"/>
               </a:ext>
             </a:extLst>
           </p:cNvPr>
@@ -2178,7 +2178,7 @@
           <a:bodyPr/>
           <a:lstStyle/>
           <a:p>
-            <a:fld id="{703FD16C-B233-48BD-87F9-A47BB7B7533B}" type="datetimeFigureOut">
+            <a:fld id="{91888F1A-99ED-403C-8F80-A743CB4F7D62}" type="datetimeFigureOut">
               <a:rPr kumimoji="1" lang="ja-JP" altLang="en-US" smtClean="0"/>
               <a:t>2026/7/30</a:t>
             </a:fld>
@@ -2191,7 +2191,7 @@
           <p:cNvPr id="4" name="フッター プレースホルダー 3">
             <a:extLst>
               <a:ext uri="{FF2B5EF4-FFF2-40B4-BE49-F238E27FC236}">
-                <a16:creationId xmlns:a16="http://schemas.microsoft.com/office/drawing/2014/main" id="{195546A8-A3DA-9A40-A682-6627BB7402F5}"/>
+                <a16:creationId xmlns:a16="http://schemas.microsoft.com/office/drawing/2014/main" id="{8FEED6E9-B1F1-2A17-8C1B-4E8F9E872A4E}"/>
               </a:ext>
             </a:extLst>
           </p:cNvPr>
@@ -2216,7 +2216,7 @@
           <p:cNvPr id="5" name="スライド番号プレースホルダー 4">
             <a:extLst>
               <a:ext uri="{FF2B5EF4-FFF2-40B4-BE49-F238E27FC236}">
-                <a16:creationId xmlns:a16="http://schemas.microsoft.com/office/drawing/2014/main" id="{ABF9932D-8968-ABE5-C54C-05D884A34301}"/>
+                <a16:creationId xmlns:a16="http://schemas.microsoft.com/office/drawing/2014/main" id="{3DAC0E78-A5FD-9F1A-980C-A8FE2EB9C76A}"/>
               </a:ext>
             </a:extLst>
           </p:cNvPr>
@@ -2232,7 +2232,7 @@
           <a:bodyPr/>
           <a:lstStyle/>
           <a:p>
-            <a:fld id="{0C0267CF-6C13-4625-9FA2-C73A9AB1C488}" type="slidenum">
+            <a:fld id="{10E4B28B-CAE4-45D9-B67A-CB4442962322}" type="slidenum">
               <a:rPr kumimoji="1" lang="ja-JP" altLang="en-US" smtClean="0"/>
               <a:t>‹#›</a:t>
             </a:fld>
@@ -2243,7 +2243,7 @@
     </p:spTree>
     <p:extLst>
       <p:ext uri="{BB962C8B-B14F-4D97-AF65-F5344CB8AC3E}">
-        <p14:creationId xmlns:p14="http://schemas.microsoft.com/office/powerpoint/2010/main" val="2832972882"/>
+        <p14:creationId xmlns:p14="http://schemas.microsoft.com/office/powerpoint/2010/main" val="3632985557"/>
       </p:ext>
     </p:extLst>
   </p:cSld>
@@ -2275,7 +2275,7 @@
           <p:cNvPr id="2" name="日付プレースホルダー 1">
             <a:extLst>
               <a:ext uri="{FF2B5EF4-FFF2-40B4-BE49-F238E27FC236}">
-                <a16:creationId xmlns:a16="http://schemas.microsoft.com/office/drawing/2014/main" id="{4BE00E8B-A6CB-BD60-1A51-F882F9FA29D8}"/>
+                <a16:creationId xmlns:a16="http://schemas.microsoft.com/office/drawing/2014/main" id="{D782C12D-F5AD-6933-BCBC-9DA4549D0D4D}"/>
               </a:ext>
             </a:extLst>
           </p:cNvPr>
@@ -2291,7 +2291,7 @@
           <a:bodyPr/>
           <a:lstStyle/>
           <a:p>
-            <a:fld id="{703FD16C-B233-48BD-87F9-A47BB7B7533B}" type="datetimeFigureOut">
+            <a:fld id="{91888F1A-99ED-403C-8F80-A743CB4F7D62}" type="datetimeFigureOut">
               <a:rPr kumimoji="1" lang="ja-JP" altLang="en-US" smtClean="0"/>
               <a:t>2026/7/30</a:t>
             </a:fld>
@@ -2304,7 +2304,7 @@
           <p:cNvPr id="3" name="フッター プレースホルダー 2">
             <a:extLst>
               <a:ext uri="{FF2B5EF4-FFF2-40B4-BE49-F238E27FC236}">
-                <a16:creationId xmlns:a16="http://schemas.microsoft.com/office/drawing/2014/main" id="{11DD1A1F-602B-62CE-49F0-0BE039CD08D8}"/>
+                <a16:creationId xmlns:a16="http://schemas.microsoft.com/office/drawing/2014/main" id="{AF6B8A73-5CE1-F04A-4395-68888B1836A4}"/>
               </a:ext>
             </a:extLst>
           </p:cNvPr>
@@ -2329,7 +2329,7 @@
           <p:cNvPr id="4" name="スライド番号プレースホルダー 3">
             <a:extLst>
               <a:ext uri="{FF2B5EF4-FFF2-40B4-BE49-F238E27FC236}">
-                <a16:creationId xmlns:a16="http://schemas.microsoft.com/office/drawing/2014/main" id="{A2AC3246-A5D8-C2F0-28D8-E7824BD53A22}"/>
+                <a16:creationId xmlns:a16="http://schemas.microsoft.com/office/drawing/2014/main" id="{D20B815B-124E-E976-8908-0CC7CE4E9AD1}"/>
               </a:ext>
             </a:extLst>
           </p:cNvPr>
@@ -2345,7 +2345,7 @@
           <a:bodyPr/>
           <a:lstStyle/>
           <a:p>
-            <a:fld id="{0C0267CF-6C13-4625-9FA2-C73A9AB1C488}" type="slidenum">
+            <a:fld id="{10E4B28B-CAE4-45D9-B67A-CB4442962322}" type="slidenum">
               <a:rPr kumimoji="1" lang="ja-JP" altLang="en-US" smtClean="0"/>
               <a:t>‹#›</a:t>
             </a:fld>
@@ -2356,7 +2356,7 @@
     </p:spTree>
     <p:extLst>
       <p:ext uri="{BB962C8B-B14F-4D97-AF65-F5344CB8AC3E}">
-        <p14:creationId xmlns:p14="http://schemas.microsoft.com/office/powerpoint/2010/main" val="1036723626"/>
+        <p14:creationId xmlns:p14="http://schemas.microsoft.com/office/powerpoint/2010/main" val="1116453245"/>
       </p:ext>
     </p:extLst>
   </p:cSld>
@@ -2388,7 +2388,7 @@
           <p:cNvPr id="2" name="タイトル 1">
             <a:extLst>
               <a:ext uri="{FF2B5EF4-FFF2-40B4-BE49-F238E27FC236}">
-                <a16:creationId xmlns:a16="http://schemas.microsoft.com/office/drawing/2014/main" id="{C035E212-B2FF-D5EA-8FDC-E7A8538D7129}"/>
+                <a16:creationId xmlns:a16="http://schemas.microsoft.com/office/drawing/2014/main" id="{9D902C90-3324-ED85-FF59-EA638CFF6615}"/>
               </a:ext>
             </a:extLst>
           </p:cNvPr>
@@ -2425,7 +2425,7 @@
           <p:cNvPr id="3" name="コンテンツ プレースホルダー 2">
             <a:extLst>
               <a:ext uri="{FF2B5EF4-FFF2-40B4-BE49-F238E27FC236}">
-                <a16:creationId xmlns:a16="http://schemas.microsoft.com/office/drawing/2014/main" id="{8D30719D-BE84-32B5-D25C-08A0E0932F11}"/>
+                <a16:creationId xmlns:a16="http://schemas.microsoft.com/office/drawing/2014/main" id="{F7A013CF-CFD1-BDFE-FF9A-77C56B77D595}"/>
               </a:ext>
             </a:extLst>
           </p:cNvPr>
@@ -2547,7 +2547,7 @@
           <p:cNvPr id="4" name="テキスト プレースホルダー 3">
             <a:extLst>
               <a:ext uri="{FF2B5EF4-FFF2-40B4-BE49-F238E27FC236}">
-                <a16:creationId xmlns:a16="http://schemas.microsoft.com/office/drawing/2014/main" id="{D7CEEAA4-2204-2B0F-E70D-509A7E754EFA}"/>
+                <a16:creationId xmlns:a16="http://schemas.microsoft.com/office/drawing/2014/main" id="{AB059BEC-075C-0A01-252A-34F7E6417222}"/>
               </a:ext>
             </a:extLst>
           </p:cNvPr>
@@ -2618,7 +2618,7 @@
           <p:cNvPr id="5" name="日付プレースホルダー 4">
             <a:extLst>
               <a:ext uri="{FF2B5EF4-FFF2-40B4-BE49-F238E27FC236}">
-                <a16:creationId xmlns:a16="http://schemas.microsoft.com/office/drawing/2014/main" id="{C02F5FC2-528B-BFFB-6158-A1B3CFC0B64F}"/>
+                <a16:creationId xmlns:a16="http://schemas.microsoft.com/office/drawing/2014/main" id="{C0505079-BC58-9970-1FD7-E49EE55F6A40}"/>
               </a:ext>
             </a:extLst>
           </p:cNvPr>
@@ -2634,7 +2634,7 @@
           <a:bodyPr/>
           <a:lstStyle/>
           <a:p>
-            <a:fld id="{703FD16C-B233-48BD-87F9-A47BB7B7533B}" type="datetimeFigureOut">
+            <a:fld id="{91888F1A-99ED-403C-8F80-A743CB4F7D62}" type="datetimeFigureOut">
               <a:rPr kumimoji="1" lang="ja-JP" altLang="en-US" smtClean="0"/>
               <a:t>2026/7/30</a:t>
             </a:fld>
@@ -2647,7 +2647,7 @@
           <p:cNvPr id="6" name="フッター プレースホルダー 5">
             <a:extLst>
               <a:ext uri="{FF2B5EF4-FFF2-40B4-BE49-F238E27FC236}">
-                <a16:creationId xmlns:a16="http://schemas.microsoft.com/office/drawing/2014/main" id="{8D64F4F9-4369-0046-B942-1BF20C0F5886}"/>
+                <a16:creationId xmlns:a16="http://schemas.microsoft.com/office/drawing/2014/main" id="{0E1B7BBF-C1C1-F55A-BBEB-6CD58DC1BACC}"/>
               </a:ext>
             </a:extLst>
           </p:cNvPr>
@@ -2672,7 +2672,7 @@
           <p:cNvPr id="7" name="スライド番号プレースホルダー 6">
             <a:extLst>
               <a:ext uri="{FF2B5EF4-FFF2-40B4-BE49-F238E27FC236}">
-                <a16:creationId xmlns:a16="http://schemas.microsoft.com/office/drawing/2014/main" id="{BB538290-E815-EDB8-95AD-B118B9BB0991}"/>
+                <a16:creationId xmlns:a16="http://schemas.microsoft.com/office/drawing/2014/main" id="{AEAFF7CD-C36F-AAB5-09B7-CB62D58CF606}"/>
               </a:ext>
             </a:extLst>
           </p:cNvPr>
@@ -2688,7 +2688,7 @@
           <a:bodyPr/>
           <a:lstStyle/>
           <a:p>
-            <a:fld id="{0C0267CF-6C13-4625-9FA2-C73A9AB1C488}" type="slidenum">
+            <a:fld id="{10E4B28B-CAE4-45D9-B67A-CB4442962322}" type="slidenum">
               <a:rPr kumimoji="1" lang="ja-JP" altLang="en-US" smtClean="0"/>
               <a:t>‹#›</a:t>
             </a:fld>
@@ -2699,7 +2699,7 @@
     </p:spTree>
     <p:extLst>
       <p:ext uri="{BB962C8B-B14F-4D97-AF65-F5344CB8AC3E}">
-        <p14:creationId xmlns:p14="http://schemas.microsoft.com/office/powerpoint/2010/main" val="1602005543"/>
+        <p14:creationId xmlns:p14="http://schemas.microsoft.com/office/powerpoint/2010/main" val="1144250678"/>
       </p:ext>
     </p:extLst>
   </p:cSld>
@@ -2731,7 +2731,7 @@
           <p:cNvPr id="2" name="タイトル 1">
             <a:extLst>
               <a:ext uri="{FF2B5EF4-FFF2-40B4-BE49-F238E27FC236}">
-                <a16:creationId xmlns:a16="http://schemas.microsoft.com/office/drawing/2014/main" id="{DCC92FDD-D54A-B824-8729-649BF180FC6B}"/>
+                <a16:creationId xmlns:a16="http://schemas.microsoft.com/office/drawing/2014/main" id="{0B467E5F-E776-ABDF-63E6-7BDD4986B3E4}"/>
               </a:ext>
             </a:extLst>
           </p:cNvPr>
@@ -2768,7 +2768,7 @@
           <p:cNvPr id="3" name="図プレースホルダー 2">
             <a:extLst>
               <a:ext uri="{FF2B5EF4-FFF2-40B4-BE49-F238E27FC236}">
-                <a16:creationId xmlns:a16="http://schemas.microsoft.com/office/drawing/2014/main" id="{5B1B369D-C36F-660E-1B4A-E07CD64E4E06}"/>
+                <a16:creationId xmlns:a16="http://schemas.microsoft.com/office/drawing/2014/main" id="{69AF4CD4-628F-3A0B-EA23-389F9253A07A}"/>
               </a:ext>
             </a:extLst>
           </p:cNvPr>
@@ -2835,7 +2835,7 @@
           <p:cNvPr id="4" name="テキスト プレースホルダー 3">
             <a:extLst>
               <a:ext uri="{FF2B5EF4-FFF2-40B4-BE49-F238E27FC236}">
-                <a16:creationId xmlns:a16="http://schemas.microsoft.com/office/drawing/2014/main" id="{BEE19384-2DD2-0657-6F52-3823F0E34C2E}"/>
+                <a16:creationId xmlns:a16="http://schemas.microsoft.com/office/drawing/2014/main" id="{BAAAB3F2-1983-FEA9-5BE6-B1887E0D9936}"/>
               </a:ext>
             </a:extLst>
           </p:cNvPr>
@@ -2906,7 +2906,7 @@
           <p:cNvPr id="5" name="日付プレースホルダー 4">
             <a:extLst>
               <a:ext uri="{FF2B5EF4-FFF2-40B4-BE49-F238E27FC236}">
-                <a16:creationId xmlns:a16="http://schemas.microsoft.com/office/drawing/2014/main" id="{0DEB8789-C39C-C2EC-D347-DCCDE2A86FFA}"/>
+                <a16:creationId xmlns:a16="http://schemas.microsoft.com/office/drawing/2014/main" id="{24B3C5DB-7590-C569-BFE9-C0B725B05602}"/>
               </a:ext>
             </a:extLst>
           </p:cNvPr>
@@ -2922,7 +2922,7 @@
           <a:bodyPr/>
           <a:lstStyle/>
           <a:p>
-            <a:fld id="{703FD16C-B233-48BD-87F9-A47BB7B7533B}" type="datetimeFigureOut">
+            <a:fld id="{91888F1A-99ED-403C-8F80-A743CB4F7D62}" type="datetimeFigureOut">
               <a:rPr kumimoji="1" lang="ja-JP" altLang="en-US" smtClean="0"/>
               <a:t>2026/7/30</a:t>
             </a:fld>
@@ -2935,7 +2935,7 @@
           <p:cNvPr id="6" name="フッター プレースホルダー 5">
             <a:extLst>
               <a:ext uri="{FF2B5EF4-FFF2-40B4-BE49-F238E27FC236}">
-                <a16:creationId xmlns:a16="http://schemas.microsoft.com/office/drawing/2014/main" id="{BAFE8E8D-3116-8323-CFB7-05CF3E9197FD}"/>
+                <a16:creationId xmlns:a16="http://schemas.microsoft.com/office/drawing/2014/main" id="{C5CF49E3-7E29-BF8B-6778-1853A5A76746}"/>
               </a:ext>
             </a:extLst>
           </p:cNvPr>
@@ -2960,7 +2960,7 @@
           <p:cNvPr id="7" name="スライド番号プレースホルダー 6">
             <a:extLst>
               <a:ext uri="{FF2B5EF4-FFF2-40B4-BE49-F238E27FC236}">
-                <a16:creationId xmlns:a16="http://schemas.microsoft.com/office/drawing/2014/main" id="{82AC4C2C-0204-47C3-A3A6-5E1DC6D0CA05}"/>
+                <a16:creationId xmlns:a16="http://schemas.microsoft.com/office/drawing/2014/main" id="{C894F27C-9AED-E7F1-7B61-FE7445279FAD}"/>
               </a:ext>
             </a:extLst>
           </p:cNvPr>
@@ -2976,7 +2976,7 @@
           <a:bodyPr/>
           <a:lstStyle/>
           <a:p>
-            <a:fld id="{0C0267CF-6C13-4625-9FA2-C73A9AB1C488}" type="slidenum">
+            <a:fld id="{10E4B28B-CAE4-45D9-B67A-CB4442962322}" type="slidenum">
               <a:rPr kumimoji="1" lang="ja-JP" altLang="en-US" smtClean="0"/>
               <a:t>‹#›</a:t>
             </a:fld>
@@ -2987,7 +2987,7 @@
     </p:spTree>
     <p:extLst>
       <p:ext uri="{BB962C8B-B14F-4D97-AF65-F5344CB8AC3E}">
-        <p14:creationId xmlns:p14="http://schemas.microsoft.com/office/powerpoint/2010/main" val="3531331501"/>
+        <p14:creationId xmlns:p14="http://schemas.microsoft.com/office/powerpoint/2010/main" val="1027167733"/>
       </p:ext>
     </p:extLst>
   </p:cSld>
@@ -3024,7 +3024,7 @@
           <p:cNvPr id="2" name="タイトル プレースホルダー 1">
             <a:extLst>
               <a:ext uri="{FF2B5EF4-FFF2-40B4-BE49-F238E27FC236}">
-                <a16:creationId xmlns:a16="http://schemas.microsoft.com/office/drawing/2014/main" id="{EAEE9998-CE32-2C30-7F1E-388942527C32}"/>
+                <a16:creationId xmlns:a16="http://schemas.microsoft.com/office/drawing/2014/main" id="{94409ED9-96EA-9699-3D50-51CC53F208CA}"/>
               </a:ext>
             </a:extLst>
           </p:cNvPr>
@@ -3062,7 +3062,7 @@
           <p:cNvPr id="3" name="テキスト プレースホルダー 2">
             <a:extLst>
               <a:ext uri="{FF2B5EF4-FFF2-40B4-BE49-F238E27FC236}">
-                <a16:creationId xmlns:a16="http://schemas.microsoft.com/office/drawing/2014/main" id="{E08EDDCD-FC4F-099B-CE48-B5BF64E9F541}"/>
+                <a16:creationId xmlns:a16="http://schemas.microsoft.com/office/drawing/2014/main" id="{3C74649A-88C3-AA27-1154-C7D7D21601D0}"/>
               </a:ext>
             </a:extLst>
           </p:cNvPr>
@@ -3161,7 +3161,7 @@
           <p:cNvPr id="4" name="日付プレースホルダー 3">
             <a:extLst>
               <a:ext uri="{FF2B5EF4-FFF2-40B4-BE49-F238E27FC236}">
-                <a16:creationId xmlns:a16="http://schemas.microsoft.com/office/drawing/2014/main" id="{7212F433-3BBE-3BF1-9201-A7301362A549}"/>
+                <a16:creationId xmlns:a16="http://schemas.microsoft.com/office/drawing/2014/main" id="{463E0C1C-743F-B6A3-CCD5-7F6008FBEC1B}"/>
               </a:ext>
             </a:extLst>
           </p:cNvPr>
@@ -3195,7 +3195,7 @@
             </a:lvl1pPr>
           </a:lstStyle>
           <a:p>
-            <a:fld id="{703FD16C-B233-48BD-87F9-A47BB7B7533B}" type="datetimeFigureOut">
+            <a:fld id="{91888F1A-99ED-403C-8F80-A743CB4F7D62}" type="datetimeFigureOut">
               <a:rPr kumimoji="1" lang="ja-JP" altLang="en-US" smtClean="0"/>
               <a:t>2026/7/30</a:t>
             </a:fld>
@@ -3208,7 +3208,7 @@
           <p:cNvPr id="5" name="フッター プレースホルダー 4">
             <a:extLst>
               <a:ext uri="{FF2B5EF4-FFF2-40B4-BE49-F238E27FC236}">
-                <a16:creationId xmlns:a16="http://schemas.microsoft.com/office/drawing/2014/main" id="{FBE01689-9DE6-9825-E7AE-15C8DD4BACF5}"/>
+                <a16:creationId xmlns:a16="http://schemas.microsoft.com/office/drawing/2014/main" id="{F26724C8-AB68-66D3-06D0-98261845D868}"/>
               </a:ext>
             </a:extLst>
           </p:cNvPr>
@@ -3251,7 +3251,7 @@
           <p:cNvPr id="6" name="スライド番号プレースホルダー 5">
             <a:extLst>
               <a:ext uri="{FF2B5EF4-FFF2-40B4-BE49-F238E27FC236}">
-                <a16:creationId xmlns:a16="http://schemas.microsoft.com/office/drawing/2014/main" id="{CD17875C-12A0-03C2-C678-4043503AD32C}"/>
+                <a16:creationId xmlns:a16="http://schemas.microsoft.com/office/drawing/2014/main" id="{FAA77442-6953-A650-DC0B-382CDD49098D}"/>
               </a:ext>
             </a:extLst>
           </p:cNvPr>
@@ -3285,7 +3285,7 @@
             </a:lvl1pPr>
           </a:lstStyle>
           <a:p>
-            <a:fld id="{0C0267CF-6C13-4625-9FA2-C73A9AB1C488}" type="slidenum">
+            <a:fld id="{10E4B28B-CAE4-45D9-B67A-CB4442962322}" type="slidenum">
               <a:rPr kumimoji="1" lang="ja-JP" altLang="en-US" smtClean="0"/>
               <a:t>‹#›</a:t>
             </a:fld>
@@ -3296,7 +3296,7 @@
     </p:spTree>
     <p:extLst>
       <p:ext uri="{BB962C8B-B14F-4D97-AF65-F5344CB8AC3E}">
-        <p14:creationId xmlns:p14="http://schemas.microsoft.com/office/powerpoint/2010/main" val="1914739894"/>
+        <p14:creationId xmlns:p14="http://schemas.microsoft.com/office/powerpoint/2010/main" val="4201791511"/>
       </p:ext>
     </p:extLst>
   </p:cSld>
@@ -3619,7 +3619,7 @@
           <p:cNvPr id="2" name="テキスト ボックス 1">
             <a:extLst>
               <a:ext uri="{FF2B5EF4-FFF2-40B4-BE49-F238E27FC236}">
-                <a16:creationId xmlns:a16="http://schemas.microsoft.com/office/drawing/2014/main" id="{0B6CFEA1-A4C6-5F31-43A3-65C8F5EE28D1}"/>
+                <a16:creationId xmlns:a16="http://schemas.microsoft.com/office/drawing/2014/main" id="{D6515019-C82E-217B-6633-BE4E1AE39514}"/>
               </a:ext>
             </a:extLst>
           </p:cNvPr>
@@ -3665,7 +3665,7 @@
           <p:cNvPr id="3" name="テキスト ボックス 2">
             <a:extLst>
               <a:ext uri="{FF2B5EF4-FFF2-40B4-BE49-F238E27FC236}">
-                <a16:creationId xmlns:a16="http://schemas.microsoft.com/office/drawing/2014/main" id="{0627A09D-DF5A-35C0-8A43-FF14B0C333CC}"/>
+                <a16:creationId xmlns:a16="http://schemas.microsoft.com/office/drawing/2014/main" id="{D8E62C23-74E0-000C-49BC-0F54F5E01D0C}"/>
               </a:ext>
             </a:extLst>
           </p:cNvPr>
@@ -3714,7 +3714,7 @@
           <p:cNvPr id="4" name="テキスト ボックス 3">
             <a:extLst>
               <a:ext uri="{FF2B5EF4-FFF2-40B4-BE49-F238E27FC236}">
-                <a16:creationId xmlns:a16="http://schemas.microsoft.com/office/drawing/2014/main" id="{5BFA3821-2F50-6848-E952-702B7AD109A5}"/>
+                <a16:creationId xmlns:a16="http://schemas.microsoft.com/office/drawing/2014/main" id="{838CA719-DE95-16DE-4D8E-341755630F7B}"/>
               </a:ext>
             </a:extLst>
           </p:cNvPr>
@@ -3754,7 +3754,7 @@
           <p:cNvPr id="5" name="テキスト ボックス 4">
             <a:extLst>
               <a:ext uri="{FF2B5EF4-FFF2-40B4-BE49-F238E27FC236}">
-                <a16:creationId xmlns:a16="http://schemas.microsoft.com/office/drawing/2014/main" id="{635E1201-4A6D-8134-08B4-23405EE5388C}"/>
+                <a16:creationId xmlns:a16="http://schemas.microsoft.com/office/drawing/2014/main" id="{1DAC29B4-5CA4-3051-CA50-6311C2B6E74C}"/>
               </a:ext>
             </a:extLst>
           </p:cNvPr>
@@ -3801,7 +3801,7 @@
             <a:hlinkClick r:id="" action="ppaction://media"/>
             <a:extLst>
               <a:ext uri="{FF2B5EF4-FFF2-40B4-BE49-F238E27FC236}">
-                <a16:creationId xmlns:a16="http://schemas.microsoft.com/office/drawing/2014/main" id="{5E77EA4E-AE74-0FBD-E9C3-F99B45F702DC}"/>
+                <a16:creationId xmlns:a16="http://schemas.microsoft.com/office/drawing/2014/main" id="{D0A88FB9-D33D-7C72-CF1F-75B626D73485}"/>
               </a:ext>
             </a:extLst>
           </p:cNvPr>
@@ -3836,7 +3836,7 @@
     </p:spTree>
     <p:extLst>
       <p:ext uri="{BB962C8B-B14F-4D97-AF65-F5344CB8AC3E}">
-        <p14:creationId xmlns:p14="http://schemas.microsoft.com/office/powerpoint/2010/main" val="3165303806"/>
+        <p14:creationId xmlns:p14="http://schemas.microsoft.com/office/powerpoint/2010/main" val="2375444775"/>
       </p:ext>
     </p:extLst>
   </p:cSld>
@@ -3960,7 +3960,7 @@
           <p:cNvPr id="2" name="テキスト ボックス 1">
             <a:extLst>
               <a:ext uri="{FF2B5EF4-FFF2-40B4-BE49-F238E27FC236}">
-                <a16:creationId xmlns:a16="http://schemas.microsoft.com/office/drawing/2014/main" id="{4D8A2C20-6FD3-6251-4160-D6FEE471539E}"/>
+                <a16:creationId xmlns:a16="http://schemas.microsoft.com/office/drawing/2014/main" id="{9B0B1D99-3BA7-E9EF-599E-2BE25C29FE54}"/>
               </a:ext>
             </a:extLst>
           </p:cNvPr>
@@ -4006,7 +4006,7 @@
           <p:cNvPr id="3" name="テキスト ボックス 2">
             <a:extLst>
               <a:ext uri="{FF2B5EF4-FFF2-40B4-BE49-F238E27FC236}">
-                <a16:creationId xmlns:a16="http://schemas.microsoft.com/office/drawing/2014/main" id="{7C88F356-903E-5C80-4772-FAEB6A8A1D5E}"/>
+                <a16:creationId xmlns:a16="http://schemas.microsoft.com/office/drawing/2014/main" id="{9661BC78-02E0-A7A2-52C9-B192CE0A4EF2}"/>
               </a:ext>
             </a:extLst>
           </p:cNvPr>
@@ -4046,7 +4046,7 @@
           <p:cNvPr id="4" name="テキスト ボックス 3">
             <a:extLst>
               <a:ext uri="{FF2B5EF4-FFF2-40B4-BE49-F238E27FC236}">
-                <a16:creationId xmlns:a16="http://schemas.microsoft.com/office/drawing/2014/main" id="{D578D868-F15C-D33B-86C6-5C43EDA405B6}"/>
+                <a16:creationId xmlns:a16="http://schemas.microsoft.com/office/drawing/2014/main" id="{D6878B16-271B-5994-6942-CD26D142B873}"/>
               </a:ext>
             </a:extLst>
           </p:cNvPr>
@@ -4056,7 +4056,7 @@
         <p:spPr>
           <a:xfrm>
             <a:off x="533400" y="3429000"/>
-            <a:ext cx="10795000" cy="707886"/>
+            <a:ext cx="10795000" cy="400110"/>
           </a:xfrm>
           <a:prstGeom prst="rect">
             <a:avLst/>
@@ -4076,14 +4076,17 @@
                 </a:solidFill>
                 <a:latin typeface="Arial" panose="020B0604020202020204" pitchFamily="34" charset="0"/>
               </a:rPr>
-              <a:t>Haikyo Archive Map Recommended repository: haikyo archive map Confirmed domain: haikyoarchive</a:t>
-            </a:r>
-            <a:endParaRPr kumimoji="1" lang="ja-JP" altLang="en-US" sz="2000">
-              <a:solidFill>
-                <a:srgbClr val="333333"/>
-              </a:solidFill>
-              <a:latin typeface="Arial" panose="020B0604020202020204" pitchFamily="34" charset="0"/>
-            </a:endParaRPr>
+              <a:t>Haikyo Archive Map</a:t>
+            </a:r>
+            <a:r>
+              <a:rPr kumimoji="1" lang="ja-JP" altLang="en-US" sz="2000">
+                <a:solidFill>
+                  <a:srgbClr val="333333"/>
+                </a:solidFill>
+                <a:latin typeface="Arial" panose="020B0604020202020204" pitchFamily="34" charset="0"/>
+              </a:rPr>
+              <a:t>の目的、構成、実装を公開コードから確認できるプロジェクトです。</a:t>
+            </a:r>
           </a:p>
         </p:txBody>
       </p:sp>
@@ -4092,7 +4095,7 @@
           <p:cNvPr id="5" name="テキスト ボックス 4">
             <a:extLst>
               <a:ext uri="{FF2B5EF4-FFF2-40B4-BE49-F238E27FC236}">
-                <a16:creationId xmlns:a16="http://schemas.microsoft.com/office/drawing/2014/main" id="{7D037844-A85E-0BB0-06B2-D118071F93F5}"/>
+                <a16:creationId xmlns:a16="http://schemas.microsoft.com/office/drawing/2014/main" id="{2F95AD11-DC7F-B2E4-E654-4F7E19D55272}"/>
               </a:ext>
             </a:extLst>
           </p:cNvPr>
@@ -4139,7 +4142,7 @@
             <a:hlinkClick r:id="" action="ppaction://media"/>
             <a:extLst>
               <a:ext uri="{FF2B5EF4-FFF2-40B4-BE49-F238E27FC236}">
-                <a16:creationId xmlns:a16="http://schemas.microsoft.com/office/drawing/2014/main" id="{A71852C5-7C66-D402-27DA-CF15826EC095}"/>
+                <a16:creationId xmlns:a16="http://schemas.microsoft.com/office/drawing/2014/main" id="{DB006808-698D-9EBC-76E6-4305F8DFFB42}"/>
               </a:ext>
             </a:extLst>
           </p:cNvPr>
@@ -4174,7 +4177,7 @@
     </p:spTree>
     <p:extLst>
       <p:ext uri="{BB962C8B-B14F-4D97-AF65-F5344CB8AC3E}">
-        <p14:creationId xmlns:p14="http://schemas.microsoft.com/office/powerpoint/2010/main" val="1795898239"/>
+        <p14:creationId xmlns:p14="http://schemas.microsoft.com/office/powerpoint/2010/main" val="1265705017"/>
       </p:ext>
     </p:extLst>
   </p:cSld>
@@ -4217,7 +4220,7 @@
                                   <p:childTnLst>
                                     <p:cmd type="call" cmd="playFrom(0.0)">
                                       <p:cBhvr>
-                                        <p:cTn id="6" dur="7711" fill="hold"/>
+                                        <p:cTn id="6" dur="7546" fill="hold"/>
                                         <p:tgtEl>
                                           <p:spTgt spid="6"/>
                                         </p:tgtEl>
@@ -4298,7 +4301,7 @@
           <p:cNvPr id="2" name="テキスト ボックス 1">
             <a:extLst>
               <a:ext uri="{FF2B5EF4-FFF2-40B4-BE49-F238E27FC236}">
-                <a16:creationId xmlns:a16="http://schemas.microsoft.com/office/drawing/2014/main" id="{B6C283D0-153F-3085-966B-7A3C48D4816F}"/>
+                <a16:creationId xmlns:a16="http://schemas.microsoft.com/office/drawing/2014/main" id="{6949719C-E7CE-C69E-5F5A-E514324FC688}"/>
               </a:ext>
             </a:extLst>
           </p:cNvPr>
@@ -4344,7 +4347,7 @@
           <p:cNvPr id="3" name="テキスト ボックス 2">
             <a:extLst>
               <a:ext uri="{FF2B5EF4-FFF2-40B4-BE49-F238E27FC236}">
-                <a16:creationId xmlns:a16="http://schemas.microsoft.com/office/drawing/2014/main" id="{B48035F7-0D27-0347-F37C-F90F46995484}"/>
+                <a16:creationId xmlns:a16="http://schemas.microsoft.com/office/drawing/2014/main" id="{0EB40704-543F-CE82-421A-CD0C9EA73279}"/>
               </a:ext>
             </a:extLst>
           </p:cNvPr>
@@ -4384,7 +4387,7 @@
           <p:cNvPr id="4" name="テキスト ボックス 3">
             <a:extLst>
               <a:ext uri="{FF2B5EF4-FFF2-40B4-BE49-F238E27FC236}">
-                <a16:creationId xmlns:a16="http://schemas.microsoft.com/office/drawing/2014/main" id="{CB8AD47F-CEBC-B857-4F9C-B5A0A14AD21B}"/>
+                <a16:creationId xmlns:a16="http://schemas.microsoft.com/office/drawing/2014/main" id="{5CE89D4B-BCE6-37B3-4221-C94EA2CF9B43}"/>
               </a:ext>
             </a:extLst>
           </p:cNvPr>
@@ -4479,7 +4482,7 @@
           <p:cNvPr id="5" name="テキスト ボックス 4">
             <a:extLst>
               <a:ext uri="{FF2B5EF4-FFF2-40B4-BE49-F238E27FC236}">
-                <a16:creationId xmlns:a16="http://schemas.microsoft.com/office/drawing/2014/main" id="{1FEDEBD4-DC98-2E49-DF68-4E3EE2BC26E4}"/>
+                <a16:creationId xmlns:a16="http://schemas.microsoft.com/office/drawing/2014/main" id="{5106277F-58FD-A1E9-E588-35169F666926}"/>
               </a:ext>
             </a:extLst>
           </p:cNvPr>
@@ -4526,7 +4529,7 @@
             <a:hlinkClick r:id="" action="ppaction://media"/>
             <a:extLst>
               <a:ext uri="{FF2B5EF4-FFF2-40B4-BE49-F238E27FC236}">
-                <a16:creationId xmlns:a16="http://schemas.microsoft.com/office/drawing/2014/main" id="{6EC3A26C-C493-0821-D653-12C26DD96C88}"/>
+                <a16:creationId xmlns:a16="http://schemas.microsoft.com/office/drawing/2014/main" id="{0BDC1ACF-EC43-1180-1846-865A4063CC0A}"/>
               </a:ext>
             </a:extLst>
           </p:cNvPr>
@@ -4561,7 +4564,7 @@
     </p:spTree>
     <p:extLst>
       <p:ext uri="{BB962C8B-B14F-4D97-AF65-F5344CB8AC3E}">
-        <p14:creationId xmlns:p14="http://schemas.microsoft.com/office/powerpoint/2010/main" val="3113302352"/>
+        <p14:creationId xmlns:p14="http://schemas.microsoft.com/office/powerpoint/2010/main" val="2061768603"/>
       </p:ext>
     </p:extLst>
   </p:cSld>
@@ -4685,7 +4688,7 @@
           <p:cNvPr id="2" name="テキスト ボックス 1">
             <a:extLst>
               <a:ext uri="{FF2B5EF4-FFF2-40B4-BE49-F238E27FC236}">
-                <a16:creationId xmlns:a16="http://schemas.microsoft.com/office/drawing/2014/main" id="{AE63522D-299D-BD6A-FA19-C22B2CC18A0B}"/>
+                <a16:creationId xmlns:a16="http://schemas.microsoft.com/office/drawing/2014/main" id="{37A991D2-9B69-AAB8-88A8-D1AF839A0B7C}"/>
               </a:ext>
             </a:extLst>
           </p:cNvPr>
@@ -4731,7 +4734,7 @@
           <p:cNvPr id="3" name="テキスト ボックス 2">
             <a:extLst>
               <a:ext uri="{FF2B5EF4-FFF2-40B4-BE49-F238E27FC236}">
-                <a16:creationId xmlns:a16="http://schemas.microsoft.com/office/drawing/2014/main" id="{8E77D0CF-A793-38D4-2A84-7ED12DE6D3FE}"/>
+                <a16:creationId xmlns:a16="http://schemas.microsoft.com/office/drawing/2014/main" id="{C841250F-649F-DC6F-BDEB-A528B04C679E}"/>
               </a:ext>
             </a:extLst>
           </p:cNvPr>
@@ -4771,7 +4774,7 @@
           <p:cNvPr id="4" name="テキスト ボックス 3">
             <a:extLst>
               <a:ext uri="{FF2B5EF4-FFF2-40B4-BE49-F238E27FC236}">
-                <a16:creationId xmlns:a16="http://schemas.microsoft.com/office/drawing/2014/main" id="{BF726F18-0761-A1FC-2F0E-1194C3E371FD}"/>
+                <a16:creationId xmlns:a16="http://schemas.microsoft.com/office/drawing/2014/main" id="{42E4F73F-8A63-D98E-D251-8A241FB6DC76}"/>
               </a:ext>
             </a:extLst>
           </p:cNvPr>
@@ -4881,7 +4884,7 @@
           <p:cNvPr id="5" name="テキスト ボックス 4">
             <a:extLst>
               <a:ext uri="{FF2B5EF4-FFF2-40B4-BE49-F238E27FC236}">
-                <a16:creationId xmlns:a16="http://schemas.microsoft.com/office/drawing/2014/main" id="{638AAE6C-7FFE-068A-96F6-1425C70ADADA}"/>
+                <a16:creationId xmlns:a16="http://schemas.microsoft.com/office/drawing/2014/main" id="{6E6E45E5-8579-E273-FB00-ED368B247E39}"/>
               </a:ext>
             </a:extLst>
           </p:cNvPr>
@@ -4928,7 +4931,7 @@
             <a:hlinkClick r:id="" action="ppaction://media"/>
             <a:extLst>
               <a:ext uri="{FF2B5EF4-FFF2-40B4-BE49-F238E27FC236}">
-                <a16:creationId xmlns:a16="http://schemas.microsoft.com/office/drawing/2014/main" id="{C8C75EDD-CB94-4D94-D2A3-9255C15A0B38}"/>
+                <a16:creationId xmlns:a16="http://schemas.microsoft.com/office/drawing/2014/main" id="{8010A5E5-8611-A0FF-10F7-B57DBE18D785}"/>
               </a:ext>
             </a:extLst>
           </p:cNvPr>
@@ -4963,7 +4966,7 @@
     </p:spTree>
     <p:extLst>
       <p:ext uri="{BB962C8B-B14F-4D97-AF65-F5344CB8AC3E}">
-        <p14:creationId xmlns:p14="http://schemas.microsoft.com/office/powerpoint/2010/main" val="246680040"/>
+        <p14:creationId xmlns:p14="http://schemas.microsoft.com/office/powerpoint/2010/main" val="760465879"/>
       </p:ext>
     </p:extLst>
   </p:cSld>
@@ -5087,7 +5090,7 @@
           <p:cNvPr id="2" name="テキスト ボックス 1">
             <a:extLst>
               <a:ext uri="{FF2B5EF4-FFF2-40B4-BE49-F238E27FC236}">
-                <a16:creationId xmlns:a16="http://schemas.microsoft.com/office/drawing/2014/main" id="{34FA1419-5341-A2F4-2457-025B9EAB2AE8}"/>
+                <a16:creationId xmlns:a16="http://schemas.microsoft.com/office/drawing/2014/main" id="{25F51D3E-4260-13D7-304E-E0E37FCCFB5A}"/>
               </a:ext>
             </a:extLst>
           </p:cNvPr>
@@ -5133,7 +5136,7 @@
           <p:cNvPr id="3" name="テキスト ボックス 2">
             <a:extLst>
               <a:ext uri="{FF2B5EF4-FFF2-40B4-BE49-F238E27FC236}">
-                <a16:creationId xmlns:a16="http://schemas.microsoft.com/office/drawing/2014/main" id="{6F0FDAD6-4797-0474-FC2F-9B5EF99D0BC6}"/>
+                <a16:creationId xmlns:a16="http://schemas.microsoft.com/office/drawing/2014/main" id="{173DB130-C600-84AD-F791-7266E8A3E577}"/>
               </a:ext>
             </a:extLst>
           </p:cNvPr>
@@ -5173,7 +5176,7 @@
           <p:cNvPr id="4" name="テキスト ボックス 3">
             <a:extLst>
               <a:ext uri="{FF2B5EF4-FFF2-40B4-BE49-F238E27FC236}">
-                <a16:creationId xmlns:a16="http://schemas.microsoft.com/office/drawing/2014/main" id="{4A97F6F3-474B-E4B7-D695-3FD8A94F05E9}"/>
+                <a16:creationId xmlns:a16="http://schemas.microsoft.com/office/drawing/2014/main" id="{DFA68C94-635B-224F-2849-BA0B0B052899}"/>
               </a:ext>
             </a:extLst>
           </p:cNvPr>
@@ -5197,20 +5200,14 @@
           <a:lstStyle/>
           <a:p>
             <a:r>
-              <a:rPr kumimoji="1" lang="en-US" altLang="ja-JP" sz="2000">
+              <a:rPr kumimoji="1" lang="ja-JP" altLang="en-US" sz="2000">
                 <a:solidFill>
                   <a:srgbClr val="333333"/>
                 </a:solidFill>
                 <a:latin typeface="Arial" panose="020B0604020202020204" pitchFamily="34" charset="0"/>
               </a:rPr>
-              <a:t>Set confirmed custom domain</a:t>
-            </a:r>
-            <a:endParaRPr kumimoji="1" lang="ja-JP" altLang="en-US" sz="2000">
-              <a:solidFill>
-                <a:srgbClr val="333333"/>
-              </a:solidFill>
-              <a:latin typeface="Arial" panose="020B0604020202020204" pitchFamily="34" charset="0"/>
-            </a:endParaRPr>
+              <a:t>直近のコミットでは、実装の見直しと継続的な改善が行われました。</a:t>
+            </a:r>
           </a:p>
         </p:txBody>
       </p:sp>
@@ -5219,7 +5216,7 @@
           <p:cNvPr id="5" name="テキスト ボックス 4">
             <a:extLst>
               <a:ext uri="{FF2B5EF4-FFF2-40B4-BE49-F238E27FC236}">
-                <a16:creationId xmlns:a16="http://schemas.microsoft.com/office/drawing/2014/main" id="{AA015A03-3E4E-F864-6ACD-780198CAC3BE}"/>
+                <a16:creationId xmlns:a16="http://schemas.microsoft.com/office/drawing/2014/main" id="{DDF27DD3-1CC2-0545-BBBF-0CE96A7E29BD}"/>
               </a:ext>
             </a:extLst>
           </p:cNvPr>
@@ -5266,7 +5263,7 @@
             <a:hlinkClick r:id="" action="ppaction://media"/>
             <a:extLst>
               <a:ext uri="{FF2B5EF4-FFF2-40B4-BE49-F238E27FC236}">
-                <a16:creationId xmlns:a16="http://schemas.microsoft.com/office/drawing/2014/main" id="{66B74450-8AC1-593F-AEDF-34807FF42E48}"/>
+                <a16:creationId xmlns:a16="http://schemas.microsoft.com/office/drawing/2014/main" id="{084444D0-C0B1-2DFB-EE24-94348BCAA2A0}"/>
               </a:ext>
             </a:extLst>
           </p:cNvPr>
@@ -5301,7 +5298,7 @@
     </p:spTree>
     <p:extLst>
       <p:ext uri="{BB962C8B-B14F-4D97-AF65-F5344CB8AC3E}">
-        <p14:creationId xmlns:p14="http://schemas.microsoft.com/office/powerpoint/2010/main" val="290955870"/>
+        <p14:creationId xmlns:p14="http://schemas.microsoft.com/office/powerpoint/2010/main" val="614495464"/>
       </p:ext>
     </p:extLst>
   </p:cSld>
@@ -5344,7 +5341,7 @@
                                   <p:childTnLst>
                                     <p:cmd type="call" cmd="playFrom(0.0)">
                                       <p:cBhvr>
-                                        <p:cTn id="6" dur="6451" fill="hold"/>
+                                        <p:cTn id="6" dur="6076" fill="hold"/>
                                         <p:tgtEl>
                                           <p:spTgt spid="6"/>
                                         </p:tgtEl>
@@ -5425,7 +5422,7 @@
           <p:cNvPr id="2" name="テキスト ボックス 1">
             <a:extLst>
               <a:ext uri="{FF2B5EF4-FFF2-40B4-BE49-F238E27FC236}">
-                <a16:creationId xmlns:a16="http://schemas.microsoft.com/office/drawing/2014/main" id="{864BF8D8-AF01-C691-A790-20923BF61D3D}"/>
+                <a16:creationId xmlns:a16="http://schemas.microsoft.com/office/drawing/2014/main" id="{B2DBE921-21FB-5ECE-E051-11DF80C2E04D}"/>
               </a:ext>
             </a:extLst>
           </p:cNvPr>
@@ -5471,7 +5468,7 @@
           <p:cNvPr id="3" name="テキスト ボックス 2">
             <a:extLst>
               <a:ext uri="{FF2B5EF4-FFF2-40B4-BE49-F238E27FC236}">
-                <a16:creationId xmlns:a16="http://schemas.microsoft.com/office/drawing/2014/main" id="{7C9FCD90-2DEF-BAE7-3DBA-261EC2A694AA}"/>
+                <a16:creationId xmlns:a16="http://schemas.microsoft.com/office/drawing/2014/main" id="{E846A5F7-24DE-816F-211B-7BD34754D254}"/>
               </a:ext>
             </a:extLst>
           </p:cNvPr>
@@ -5511,7 +5508,7 @@
           <p:cNvPr id="4" name="テキスト ボックス 3">
             <a:extLst>
               <a:ext uri="{FF2B5EF4-FFF2-40B4-BE49-F238E27FC236}">
-                <a16:creationId xmlns:a16="http://schemas.microsoft.com/office/drawing/2014/main" id="{224DA775-CA9F-DBA6-3869-1687842C52FC}"/>
+                <a16:creationId xmlns:a16="http://schemas.microsoft.com/office/drawing/2014/main" id="{963EB5A6-1671-784B-7C82-9F15F7F7A130}"/>
               </a:ext>
             </a:extLst>
           </p:cNvPr>
@@ -5576,7 +5573,7 @@
           <p:cNvPr id="5" name="テキスト ボックス 4">
             <a:extLst>
               <a:ext uri="{FF2B5EF4-FFF2-40B4-BE49-F238E27FC236}">
-                <a16:creationId xmlns:a16="http://schemas.microsoft.com/office/drawing/2014/main" id="{3F98E7C1-4D95-8986-E337-E47F1BE442EE}"/>
+                <a16:creationId xmlns:a16="http://schemas.microsoft.com/office/drawing/2014/main" id="{162A640F-9DE7-BD5E-227A-58E7A1EEF2A3}"/>
               </a:ext>
             </a:extLst>
           </p:cNvPr>
@@ -5623,7 +5620,7 @@
             <a:hlinkClick r:id="" action="ppaction://media"/>
             <a:extLst>
               <a:ext uri="{FF2B5EF4-FFF2-40B4-BE49-F238E27FC236}">
-                <a16:creationId xmlns:a16="http://schemas.microsoft.com/office/drawing/2014/main" id="{C2553340-469E-92BD-BC1E-30CC298815FB}"/>
+                <a16:creationId xmlns:a16="http://schemas.microsoft.com/office/drawing/2014/main" id="{E7BB2216-1AE7-4297-7050-FF4C90BACE74}"/>
               </a:ext>
             </a:extLst>
           </p:cNvPr>
@@ -5658,7 +5655,7 @@
     </p:spTree>
     <p:extLst>
       <p:ext uri="{BB962C8B-B14F-4D97-AF65-F5344CB8AC3E}">
-        <p14:creationId xmlns:p14="http://schemas.microsoft.com/office/powerpoint/2010/main" val="842461183"/>
+        <p14:creationId xmlns:p14="http://schemas.microsoft.com/office/powerpoint/2010/main" val="1181673913"/>
       </p:ext>
     </p:extLst>
   </p:cSld>
